--- a/companies/ashcombe-advisory/Engagements/Barrera Group/2017.03.23 - Briefing Deck - Barrera Group.pptx
+++ b/companies/ashcombe-advisory/Engagements/Barrera Group/2017.03.23 - Briefing Deck - Barrera Group.pptx
@@ -3114,7 +3114,7 @@
                   <a:srgbClr val="4A2E2A"/>
                 </a:solidFill>
               </a:rPr>
-              <a:t>Positioning Brief: Barrera Group</a:t>
+              <a:t>Corporate Positioning for Barrera Group</a:t>
             </a:r>
           </a:p>
         </p:txBody>
@@ -3141,31 +3141,25 @@
           <a:p>
             <a:pPr lvl="1"/>
             <a:r>
-              <a:t>Engagement: Corporate Positioning for Barrera Group</a:t>
+              <a:t>Briefing for Mary Frank, Director of Operations</a:t>
             </a:r>
           </a:p>
           <a:p>
             <a:pPr lvl="1"/>
             <a:r>
-              <a:t>Kickoff: February 15, 2017</a:t>
+              <a:t>Prepared by Daniel Valenzuela, Ashcombe Advisory Partners</a:t>
             </a:r>
           </a:p>
           <a:p>
             <a:pPr lvl="1"/>
             <a:r>
-              <a:t>Prepared by Daniel Valenzuela, Advisor</a:t>
+              <a:t>Engagement under way since February 15, 2017</a:t>
             </a:r>
           </a:p>
           <a:p>
             <a:pPr lvl="1"/>
             <a:r>
-              <a:t>Drafting support: Michelle Rose, Communications Associate</a:t>
-            </a:r>
-          </a:p>
-          <a:p>
-            <a:pPr lvl="1"/>
-            <a:r>
-              <a:t>Client lead: Mary Frank, Director of Operations</a:t>
+              <a:t>Working draft for discussion; not for wider circulation</a:t>
             </a:r>
           </a:p>
         </p:txBody>
@@ -3209,7 +3203,7 @@
                   <a:srgbClr val="4A2E2A"/>
                 </a:solidFill>
               </a:rPr>
-              <a:t>Where the Story Sits Today</a:t>
+              <a:t>Material reviewed to date</a:t>
             </a:r>
           </a:p>
         </p:txBody>
@@ -3231,31 +3225,25 @@
           <a:p>
             <a:pPr lvl="1"/>
             <a:r>
-              <a:t>The operating results are solid, but the outside story trails what the business actually does.</a:t>
+              <a:t>How the company describes itself now: website, investor materials, and press releases from the past year</a:t>
             </a:r>
           </a:p>
           <a:p>
             <a:pPr lvl="1"/>
             <a:r>
-              <a:t>The language reads differently on the website, in recent releases, and in leadership remarks.</a:t>
+              <a:t>Press coverage over the same period, sorted by outlet and by how each story described the business</a:t>
             </a:r>
           </a:p>
           <a:p>
             <a:pPr lvl="1"/>
             <a:r>
-              <a:t>There is no single sentence an analyst or reporter would reach for to describe the company.</a:t>
+              <a:t>Notes from the first round of leadership interviews</a:t>
             </a:r>
           </a:p>
           <a:p>
             <a:pPr lvl="1"/>
             <a:r>
-              <a:t>Two competitors have already claimed category language this business has a stronger right to.</a:t>
-            </a:r>
-          </a:p>
-          <a:p>
-            <a:pPr lvl="1"/>
-            <a:r>
-              <a:t>The upside is real: the fundamentals support a sharper, more confident story than the one being told.</a:t>
+              <a:t>Sector media list and reporter notes, maintained by Michelle Rose</a:t>
             </a:r>
           </a:p>
         </p:txBody>
@@ -3299,7 +3287,7 @@
                   <a:srgbClr val="4A2E2A"/>
                 </a:solidFill>
               </a:rPr>
-              <a:t>What We Heard at Kickoff</a:t>
+              <a:t>What the review shows</a:t>
             </a:r>
           </a:p>
         </p:txBody>
@@ -3321,25 +3309,25 @@
           <a:p>
             <a:pPr lvl="1"/>
             <a:r>
-              <a:t>Leadership wants growth described as disciplined, not scale for its own sake.</a:t>
+              <a:t>The business is described in several different ways, depending on who is speaking and to whom</a:t>
             </a:r>
           </a:p>
           <a:p>
             <a:pPr lvl="1"/>
             <a:r>
-              <a:t>The board does not want anything that reads as pre-IPO promotion.</a:t>
+              <a:t>Reporters still repeat the description used in older press releases</a:t>
             </a:r>
           </a:p>
           <a:p>
             <a:pPr lvl="1"/>
             <a:r>
-              <a:t>Operations sees daylight between how the company runs and how it currently sounds.</a:t>
+              <a:t>The operating record is the strongest proof point and the one mentioned least often</a:t>
             </a:r>
           </a:p>
           <a:p>
             <a:pPr lvl="1"/>
             <a:r>
-              <a:t>Every external claim needs a fact behind it that your team can stand up on request.</a:t>
+              <a:t>Leadership is consistent on what the business does; the order of the message varies from person to person</a:t>
             </a:r>
           </a:p>
         </p:txBody>
@@ -3383,7 +3371,7 @@
                   <a:srgbClr val="4A2E2A"/>
                 </a:solidFill>
               </a:rPr>
-              <a:t>The Frame We Are Building</a:t>
+              <a:t>Directions for the positioning statement</a:t>
             </a:r>
           </a:p>
         </p:txBody>
@@ -3405,31 +3393,25 @@
           <a:p>
             <a:pPr lvl="1"/>
             <a:r>
-              <a:t>One core positioning statement the whole company can repeat without adjustment.</a:t>
+              <a:t>A. Lead with the operating record, then say where the company is headed</a:t>
             </a:r>
           </a:p>
           <a:p>
             <a:pPr lvl="1"/>
             <a:r>
-              <a:t>A messaging map that pairs each audience with a single claim and the proof behind it.</a:t>
+              <a:t>B. Lead with where the company is headed, supported by the record so far</a:t>
             </a:r>
           </a:p>
           <a:p>
             <a:pPr lvl="1"/>
             <a:r>
-              <a:t>An executive narrative so leaders tell the same story in the same order.</a:t>
+              <a:t>C. One core statement, with separate wording for investors and for the press</a:t>
             </a:r>
           </a:p>
           <a:p>
             <a:pPr lvl="1"/>
             <a:r>
-              <a:t>A plain-language replacement for the boilerplate that has aged out of use.</a:t>
-            </a:r>
-          </a:p>
-          <a:p>
-            <a:pPr lvl="1"/>
-            <a:r>
-              <a:t>An announcement calendar ordered so each release reinforces the one before it.</a:t>
+              <a:t>Working recommendation: A, pending comments from the leadership team</a:t>
             </a:r>
           </a:p>
         </p:txBody>
@@ -3473,7 +3455,7 @@
                   <a:srgbClr val="4A2E2A"/>
                 </a:solidFill>
               </a:rPr>
-              <a:t>How the First Weeks Run</a:t>
+              <a:t>Who is working on this</a:t>
             </a:r>
           </a:p>
         </p:txBody>
@@ -3495,31 +3477,25 @@
           <a:p>
             <a:pPr lvl="1"/>
             <a:r>
-              <a:t>We gather the current materials and mark every place the language diverges.</a:t>
+              <a:t>Daniel Valenzuela, Advisor: day-to-day lead and drafting</a:t>
             </a:r>
           </a:p>
           <a:p>
             <a:pPr lvl="1"/>
             <a:r>
-              <a:t>Michelle Rose turns the agreed direction into draft copy for your review.</a:t>
+              <a:t>Julie Hill, Managing Partner: reviews all language before it leaves the working group</a:t>
             </a:r>
           </a:p>
           <a:p>
             <a:pPr lvl="1"/>
             <a:r>
-              <a:t>Nothing investor-facing circulates until the internal narrative is settled.</a:t>
+              <a:t>Michelle Rose, Communications Associate: media list and reporter background</a:t>
             </a:r>
           </a:p>
           <a:p>
             <a:pPr lvl="1"/>
             <a:r>
-              <a:t>You see each draft before it moves past the working group.</a:t>
-            </a:r>
-          </a:p>
-          <a:p>
-            <a:pPr lvl="1"/>
-            <a:r>
-              <a:t>We hold one master copy of every document so your team is never reading an old version.</a:t>
+              <a:t>Mary Frank, Director of Operations: lead contact at Barrera Group; gathers leadership comments</a:t>
             </a:r>
           </a:p>
         </p:txBody>
@@ -3563,7 +3539,7 @@
                   <a:srgbClr val="4A2E2A"/>
                 </a:solidFill>
               </a:rPr>
-              <a:t>Next Step</a:t>
+              <a:t>What happens next</a:t>
             </a:r>
           </a:p>
         </p:txBody>
@@ -3585,13 +3561,25 @@
           <a:p>
             <a:pPr lvl="1"/>
             <a:r>
-              <a:t>Working group confirmed: Daniel Valenzuela and Michelle Rose here, Mary Frank leading on your side.</a:t>
+              <a:t>Review call to walk through the three directions and choose one</a:t>
             </a:r>
           </a:p>
           <a:p>
             <a:pPr lvl="1"/>
             <a:r>
-              <a:t>Send two or three windows this week for a thirty-minute walk-through of the draft messaging map, and I will set it up.</a:t>
+              <a:t>Leadership comments on this deck, gathered by Mary Frank and returned as one set</a:t>
+            </a:r>
+          </a:p>
+          <a:p>
+            <a:pPr lvl="1"/>
+            <a:r>
+              <a:t>Drafting of the statement and supporting points on the chosen direction</a:t>
+            </a:r>
+          </a:p>
+          <a:p>
+            <a:pPr lvl="1"/>
+            <a:r>
+              <a:t>First step: set a time for the review call</a:t>
             </a:r>
           </a:p>
         </p:txBody>
